--- a/Live-lecture-slides/CITS5503Virtualisation_S3_week3.pptx
+++ b/Live-lecture-slides/CITS5503Virtualisation_S3_week3.pptx
@@ -5908,7 +5908,7 @@
             <a:fld id="{B61BEF0D-F0BB-DE4B-95CE-6DB70DBA9567}" type="datetimeFigureOut">
               <a:rPr lang="en-US" smtClean="0"/>
               <a:pPr/>
-              <a:t>8/3/2026</a:t>
+              <a:t>8/5/2026</a:t>
             </a:fld>
             <a:endParaRPr lang="en-US" dirty="0"/>
           </a:p>
@@ -6108,7 +6108,7 @@
             <a:fld id="{B61BEF0D-F0BB-DE4B-95CE-6DB70DBA9567}" type="datetimeFigureOut">
               <a:rPr lang="en-US" smtClean="0"/>
               <a:pPr/>
-              <a:t>8/3/2026</a:t>
+              <a:t>8/5/2026</a:t>
             </a:fld>
             <a:endParaRPr lang="en-US" dirty="0"/>
           </a:p>
@@ -6323,7 +6323,7 @@
             <a:fld id="{B61BEF0D-F0BB-DE4B-95CE-6DB70DBA9567}" type="datetimeFigureOut">
               <a:rPr lang="en-US" smtClean="0"/>
               <a:pPr/>
-              <a:t>8/3/2026</a:t>
+              <a:t>8/5/2026</a:t>
             </a:fld>
             <a:endParaRPr lang="en-US" dirty="0"/>
           </a:p>
@@ -6863,7 +6863,7 @@
             <a:fld id="{B61BEF0D-F0BB-DE4B-95CE-6DB70DBA9567}" type="datetimeFigureOut">
               <a:rPr lang="en-US" smtClean="0"/>
               <a:pPr/>
-              <a:t>8/3/2026</a:t>
+              <a:t>8/5/2026</a:t>
             </a:fld>
             <a:endParaRPr lang="en-US" dirty="0"/>
           </a:p>
@@ -7141,7 +7141,7 @@
             <a:fld id="{B61BEF0D-F0BB-DE4B-95CE-6DB70DBA9567}" type="datetimeFigureOut">
               <a:rPr lang="en-US" smtClean="0"/>
               <a:pPr/>
-              <a:t>8/3/2026</a:t>
+              <a:t>8/5/2026</a:t>
             </a:fld>
             <a:endParaRPr lang="en-US" dirty="0"/>
           </a:p>
@@ -7413,7 +7413,7 @@
             <a:fld id="{B61BEF0D-F0BB-DE4B-95CE-6DB70DBA9567}" type="datetimeFigureOut">
               <a:rPr lang="en-US" smtClean="0"/>
               <a:pPr/>
-              <a:t>8/3/2026</a:t>
+              <a:t>8/5/2026</a:t>
             </a:fld>
             <a:endParaRPr lang="en-US" dirty="0"/>
           </a:p>
@@ -7832,7 +7832,7 @@
             <a:fld id="{B61BEF0D-F0BB-DE4B-95CE-6DB70DBA9567}" type="datetimeFigureOut">
               <a:rPr lang="en-US" smtClean="0"/>
               <a:pPr/>
-              <a:t>8/3/2026</a:t>
+              <a:t>8/5/2026</a:t>
             </a:fld>
             <a:endParaRPr lang="en-US" dirty="0"/>
           </a:p>
@@ -7980,7 +7980,7 @@
             <a:fld id="{B61BEF0D-F0BB-DE4B-95CE-6DB70DBA9567}" type="datetimeFigureOut">
               <a:rPr lang="en-US" smtClean="0"/>
               <a:pPr/>
-              <a:t>8/3/2026</a:t>
+              <a:t>8/5/2026</a:t>
             </a:fld>
             <a:endParaRPr lang="en-US" dirty="0"/>
           </a:p>
@@ -8100,7 +8100,7 @@
             <a:fld id="{B61BEF0D-F0BB-DE4B-95CE-6DB70DBA9567}" type="datetimeFigureOut">
               <a:rPr lang="en-US" smtClean="0"/>
               <a:pPr/>
-              <a:t>8/3/2026</a:t>
+              <a:t>8/5/2026</a:t>
             </a:fld>
             <a:endParaRPr lang="en-US" dirty="0"/>
           </a:p>
@@ -8418,7 +8418,7 @@
             <a:fld id="{B61BEF0D-F0BB-DE4B-95CE-6DB70DBA9567}" type="datetimeFigureOut">
               <a:rPr lang="en-US" smtClean="0"/>
               <a:pPr/>
-              <a:t>8/3/2026</a:t>
+              <a:t>8/5/2026</a:t>
             </a:fld>
             <a:endParaRPr lang="en-US" dirty="0"/>
           </a:p>
@@ -8713,7 +8713,7 @@
             <a:fld id="{B61BEF0D-F0BB-DE4B-95CE-6DB70DBA9567}" type="datetimeFigureOut">
               <a:rPr lang="en-US" smtClean="0"/>
               <a:pPr/>
-              <a:t>8/3/2026</a:t>
+              <a:t>8/5/2026</a:t>
             </a:fld>
             <a:endParaRPr lang="en-US" dirty="0"/>
           </a:p>
@@ -8961,7 +8961,7 @@
             <a:fld id="{B61BEF0D-F0BB-DE4B-95CE-6DB70DBA9567}" type="datetimeFigureOut">
               <a:rPr lang="en-US" smtClean="0"/>
               <a:pPr/>
-              <a:t>8/3/2026</a:t>
+              <a:t>8/5/2026</a:t>
             </a:fld>
             <a:endParaRPr lang="en-US" dirty="0"/>
           </a:p>
@@ -24825,7 +24825,7 @@
           </a:ln>
           <a:extLst>
             <a:ext uri="{C572A759-6A51-4108-AA02-DFA0A04FC94B}">
-              <ma14:wrappingTextBoxFlag xmlns="" xmlns:m="http://schemas.openxmlformats.org/officeDocument/2006/math" xmlns:a14="http://schemas.microsoft.com/office/drawing/2010/main" xmlns:ma14="http://schemas.microsoft.com/office/mac/drawingml/2011/main" val="1"/>
+              <ma14:wrappingTextBoxFlag xmlns:ma14="http://schemas.microsoft.com/office/mac/drawingml/2011/main" xmlns:a14="http://schemas.microsoft.com/office/drawing/2010/main" xmlns:m="http://schemas.openxmlformats.org/officeDocument/2006/math" xmlns="" val="1"/>
             </a:ext>
           </a:extLst>
         </p:spPr>
@@ -25224,7 +25224,7 @@
           </a:ln>
           <a:extLst>
             <a:ext uri="{C572A759-6A51-4108-AA02-DFA0A04FC94B}">
-              <ma14:wrappingTextBoxFlag xmlns="" xmlns:m="http://schemas.openxmlformats.org/officeDocument/2006/math" xmlns:a14="http://schemas.microsoft.com/office/drawing/2010/main" xmlns:ma14="http://schemas.microsoft.com/office/mac/drawingml/2011/main" val="1"/>
+              <ma14:wrappingTextBoxFlag xmlns:ma14="http://schemas.microsoft.com/office/mac/drawingml/2011/main" xmlns:a14="http://schemas.microsoft.com/office/drawing/2010/main" xmlns:m="http://schemas.openxmlformats.org/officeDocument/2006/math" xmlns="" val="1"/>
             </a:ext>
           </a:extLst>
         </p:spPr>
@@ -25272,7 +25272,7 @@
           </a:ln>
           <a:extLst>
             <a:ext uri="{C572A759-6A51-4108-AA02-DFA0A04FC94B}">
-              <ma14:wrappingTextBoxFlag xmlns="" xmlns:m="http://schemas.openxmlformats.org/officeDocument/2006/math" xmlns:a14="http://schemas.microsoft.com/office/drawing/2010/main" xmlns:ma14="http://schemas.microsoft.com/office/mac/drawingml/2011/main" val="1"/>
+              <ma14:wrappingTextBoxFlag xmlns:ma14="http://schemas.microsoft.com/office/mac/drawingml/2011/main" xmlns:a14="http://schemas.microsoft.com/office/drawing/2010/main" xmlns:m="http://schemas.openxmlformats.org/officeDocument/2006/math" xmlns="" val="1"/>
             </a:ext>
           </a:extLst>
         </p:spPr>
@@ -25320,7 +25320,7 @@
           </a:ln>
           <a:extLst>
             <a:ext uri="{C572A759-6A51-4108-AA02-DFA0A04FC94B}">
-              <ma14:wrappingTextBoxFlag xmlns="" xmlns:m="http://schemas.openxmlformats.org/officeDocument/2006/math" xmlns:a14="http://schemas.microsoft.com/office/drawing/2010/main" xmlns:ma14="http://schemas.microsoft.com/office/mac/drawingml/2011/main" val="1"/>
+              <ma14:wrappingTextBoxFlag xmlns:ma14="http://schemas.microsoft.com/office/mac/drawingml/2011/main" xmlns:a14="http://schemas.microsoft.com/office/drawing/2010/main" xmlns:m="http://schemas.openxmlformats.org/officeDocument/2006/math" xmlns="" val="1"/>
             </a:ext>
           </a:extLst>
         </p:spPr>
@@ -25395,7 +25395,7 @@
           </a:ln>
           <a:extLst>
             <a:ext uri="{C572A759-6A51-4108-AA02-DFA0A04FC94B}">
-              <ma14:wrappingTextBoxFlag xmlns="" xmlns:m="http://schemas.openxmlformats.org/officeDocument/2006/math" xmlns:a14="http://schemas.microsoft.com/office/drawing/2010/main" xmlns:ma14="http://schemas.microsoft.com/office/mac/drawingml/2011/main" val="1"/>
+              <ma14:wrappingTextBoxFlag xmlns:ma14="http://schemas.microsoft.com/office/mac/drawingml/2011/main" xmlns:a14="http://schemas.microsoft.com/office/drawing/2010/main" xmlns:m="http://schemas.openxmlformats.org/officeDocument/2006/math" xmlns="" val="1"/>
             </a:ext>
           </a:extLst>
         </p:spPr>
@@ -25443,7 +25443,7 @@
           </a:ln>
           <a:extLst>
             <a:ext uri="{C572A759-6A51-4108-AA02-DFA0A04FC94B}">
-              <ma14:wrappingTextBoxFlag xmlns="" xmlns:m="http://schemas.openxmlformats.org/officeDocument/2006/math" xmlns:a14="http://schemas.microsoft.com/office/drawing/2010/main" xmlns:ma14="http://schemas.microsoft.com/office/mac/drawingml/2011/main" val="1"/>
+              <ma14:wrappingTextBoxFlag xmlns:ma14="http://schemas.microsoft.com/office/mac/drawingml/2011/main" xmlns:a14="http://schemas.microsoft.com/office/drawing/2010/main" xmlns:m="http://schemas.openxmlformats.org/officeDocument/2006/math" xmlns="" val="1"/>
             </a:ext>
           </a:extLst>
         </p:spPr>
@@ -25523,7 +25523,7 @@
           </a:ln>
           <a:extLst>
             <a:ext uri="{C572A759-6A51-4108-AA02-DFA0A04FC94B}">
-              <ma14:wrappingTextBoxFlag xmlns="" xmlns:m="http://schemas.openxmlformats.org/officeDocument/2006/math" xmlns:a14="http://schemas.microsoft.com/office/drawing/2010/main" xmlns:ma14="http://schemas.microsoft.com/office/mac/drawingml/2011/main" val="1"/>
+              <ma14:wrappingTextBoxFlag xmlns:ma14="http://schemas.microsoft.com/office/mac/drawingml/2011/main" xmlns:a14="http://schemas.microsoft.com/office/drawing/2010/main" xmlns:m="http://schemas.openxmlformats.org/officeDocument/2006/math" xmlns="" val="1"/>
             </a:ext>
           </a:extLst>
         </p:spPr>
@@ -28325,8 +28325,12 @@
               </a:defRPr>
             </a:pPr>
             <a:r>
+              <a:rPr lang="en-AU" dirty="0"/>
+              <a:t>Daniel</a:t>
+            </a:r>
+            <a:r>
               <a:rPr dirty="0"/>
-              <a:t>Charlie’s VM</a:t>
+              <a:t>’s VM</a:t>
             </a:r>
           </a:p>
         </p:txBody>
